--- a/Hogyan Alkossunk egy álomcsapatot amiben egy öröm dolgozni.pptx
+++ b/Hogyan Alkossunk egy álomcsapatot amiben egy öröm dolgozni.pptx
@@ -108,6 +108,11 @@
       </a:defRPr>
     </a:lvl9pPr>
   </p:defaultTextStyle>
+  <p:extLst>
+    <p:ext uri="{EFAFB233-063F-42B5-8137-9DF3F51BA10A}">
+      <p15:sldGuideLst xmlns:p15="http://schemas.microsoft.com/office/powerpoint/2012/main"/>
+    </p:ext>
+  </p:extLst>
 </p:presentation>
 </file>
 
@@ -282,7 +287,7 @@
           <a:p>
             <a:fld id="{FEDF7954-FA13-4044-A506-0E0DBA697897}" type="datetimeFigureOut">
               <a:rPr lang="hu-HU" smtClean="0"/>
-              <a:t>2026.09.21.</a:t>
+              <a:t>2026.09.24.</a:t>
             </a:fld>
             <a:endParaRPr lang="hu-HU"/>
           </a:p>
@@ -594,7 +599,7 @@
           <a:p>
             <a:fld id="{FEDF7954-FA13-4044-A506-0E0DBA697897}" type="datetimeFigureOut">
               <a:rPr lang="hu-HU" smtClean="0"/>
-              <a:t>2026.09.21.</a:t>
+              <a:t>2026.09.24.</a:t>
             </a:fld>
             <a:endParaRPr lang="hu-HU"/>
           </a:p>
@@ -816,7 +821,7 @@
           <a:p>
             <a:fld id="{FEDF7954-FA13-4044-A506-0E0DBA697897}" type="datetimeFigureOut">
               <a:rPr lang="hu-HU" smtClean="0"/>
-              <a:t>2026.09.21.</a:t>
+              <a:t>2026.09.24.</a:t>
             </a:fld>
             <a:endParaRPr lang="hu-HU"/>
           </a:p>
@@ -1107,7 +1112,7 @@
           <a:p>
             <a:fld id="{FEDF7954-FA13-4044-A506-0E0DBA697897}" type="datetimeFigureOut">
               <a:rPr lang="hu-HU" smtClean="0"/>
-              <a:t>2026.09.21.</a:t>
+              <a:t>2026.09.24.</a:t>
             </a:fld>
             <a:endParaRPr lang="hu-HU"/>
           </a:p>
@@ -1561,7 +1566,7 @@
           <a:p>
             <a:fld id="{FEDF7954-FA13-4044-A506-0E0DBA697897}" type="datetimeFigureOut">
               <a:rPr lang="hu-HU" smtClean="0"/>
-              <a:t>2026.09.21.</a:t>
+              <a:t>2026.09.24.</a:t>
             </a:fld>
             <a:endParaRPr lang="hu-HU"/>
           </a:p>
@@ -2137,7 +2142,7 @@
           <a:p>
             <a:fld id="{FEDF7954-FA13-4044-A506-0E0DBA697897}" type="datetimeFigureOut">
               <a:rPr lang="hu-HU" smtClean="0"/>
-              <a:t>2026.09.21.</a:t>
+              <a:t>2026.09.24.</a:t>
             </a:fld>
             <a:endParaRPr lang="hu-HU"/>
           </a:p>
@@ -2989,7 +2994,7 @@
           <a:p>
             <a:fld id="{FEDF7954-FA13-4044-A506-0E0DBA697897}" type="datetimeFigureOut">
               <a:rPr lang="hu-HU" smtClean="0"/>
-              <a:t>2026.09.21.</a:t>
+              <a:t>2026.09.24.</a:t>
             </a:fld>
             <a:endParaRPr lang="hu-HU"/>
           </a:p>
@@ -3194,7 +3199,7 @@
           <a:p>
             <a:fld id="{FEDF7954-FA13-4044-A506-0E0DBA697897}" type="datetimeFigureOut">
               <a:rPr lang="hu-HU" smtClean="0"/>
-              <a:t>2026.09.21.</a:t>
+              <a:t>2026.09.24.</a:t>
             </a:fld>
             <a:endParaRPr lang="hu-HU"/>
           </a:p>
@@ -3408,7 +3413,7 @@
           <a:p>
             <a:fld id="{FEDF7954-FA13-4044-A506-0E0DBA697897}" type="datetimeFigureOut">
               <a:rPr lang="hu-HU" smtClean="0"/>
-              <a:t>2026.09.21.</a:t>
+              <a:t>2026.09.24.</a:t>
             </a:fld>
             <a:endParaRPr lang="hu-HU"/>
           </a:p>
@@ -3613,7 +3618,7 @@
           <a:p>
             <a:fld id="{FEDF7954-FA13-4044-A506-0E0DBA697897}" type="datetimeFigureOut">
               <a:rPr lang="hu-HU" smtClean="0"/>
-              <a:t>2026.09.21.</a:t>
+              <a:t>2026.09.24.</a:t>
             </a:fld>
             <a:endParaRPr lang="hu-HU"/>
           </a:p>
@@ -3893,7 +3898,7 @@
           <a:p>
             <a:fld id="{FEDF7954-FA13-4044-A506-0E0DBA697897}" type="datetimeFigureOut">
               <a:rPr lang="hu-HU" smtClean="0"/>
-              <a:t>2026.09.21.</a:t>
+              <a:t>2026.09.24.</a:t>
             </a:fld>
             <a:endParaRPr lang="hu-HU"/>
           </a:p>
@@ -4160,7 +4165,7 @@
           <a:p>
             <a:fld id="{FEDF7954-FA13-4044-A506-0E0DBA697897}" type="datetimeFigureOut">
               <a:rPr lang="hu-HU" smtClean="0"/>
-              <a:t>2026.09.21.</a:t>
+              <a:t>2026.09.24.</a:t>
             </a:fld>
             <a:endParaRPr lang="hu-HU"/>
           </a:p>
@@ -4575,7 +4580,7 @@
           <a:p>
             <a:fld id="{FEDF7954-FA13-4044-A506-0E0DBA697897}" type="datetimeFigureOut">
               <a:rPr lang="hu-HU" smtClean="0"/>
-              <a:t>2026.09.21.</a:t>
+              <a:t>2026.09.24.</a:t>
             </a:fld>
             <a:endParaRPr lang="hu-HU"/>
           </a:p>
@@ -4723,7 +4728,7 @@
           <a:p>
             <a:fld id="{FEDF7954-FA13-4044-A506-0E0DBA697897}" type="datetimeFigureOut">
               <a:rPr lang="hu-HU" smtClean="0"/>
-              <a:t>2026.09.21.</a:t>
+              <a:t>2026.09.24.</a:t>
             </a:fld>
             <a:endParaRPr lang="hu-HU"/>
           </a:p>
@@ -4848,7 +4853,7 @@
           <a:p>
             <a:fld id="{FEDF7954-FA13-4044-A506-0E0DBA697897}" type="datetimeFigureOut">
               <a:rPr lang="hu-HU" smtClean="0"/>
-              <a:t>2026.09.21.</a:t>
+              <a:t>2026.09.24.</a:t>
             </a:fld>
             <a:endParaRPr lang="hu-HU"/>
           </a:p>
@@ -5127,7 +5132,7 @@
           <a:p>
             <a:fld id="{FEDF7954-FA13-4044-A506-0E0DBA697897}" type="datetimeFigureOut">
               <a:rPr lang="hu-HU" smtClean="0"/>
-              <a:t>2026.09.21.</a:t>
+              <a:t>2026.09.24.</a:t>
             </a:fld>
             <a:endParaRPr lang="hu-HU"/>
           </a:p>
@@ -5439,7 +5444,7 @@
           <a:p>
             <a:fld id="{FEDF7954-FA13-4044-A506-0E0DBA697897}" type="datetimeFigureOut">
               <a:rPr lang="hu-HU" smtClean="0"/>
-              <a:t>2026.09.21.</a:t>
+              <a:t>2026.09.24.</a:t>
             </a:fld>
             <a:endParaRPr lang="hu-HU"/>
           </a:p>
@@ -5692,7 +5697,7 @@
           <a:p>
             <a:fld id="{FEDF7954-FA13-4044-A506-0E0DBA697897}" type="datetimeFigureOut">
               <a:rPr lang="hu-HU" smtClean="0"/>
-              <a:t>2026.09.21.</a:t>
+              <a:t>2026.09.24.</a:t>
             </a:fld>
             <a:endParaRPr lang="hu-HU"/>
           </a:p>
@@ -6422,7 +6427,7 @@
         </p:nvSpPr>
         <p:spPr>
           <a:xfrm>
-            <a:off x="-84531" y="692356"/>
+            <a:off x="-69305" y="879633"/>
             <a:ext cx="9253697" cy="1371599"/>
           </a:xfrm>
         </p:spPr>
@@ -6450,7 +6455,7 @@
               <a:buChar char="-"/>
             </a:pPr>
             <a:r>
-              <a:rPr lang="hu-HU" sz="2400" dirty="0"/>
+              <a:rPr lang="hu-HU" sz="2000" dirty="0"/>
               <a:t>Az adott személy értse az adott témát, ne vegyünk fel szakácsot ha informatikával kapcsolatos a munka</a:t>
             </a:r>
           </a:p>
@@ -6459,7 +6464,7 @@
               <a:buFontTx/>
               <a:buChar char="-"/>
             </a:pPr>
-            <a:endParaRPr lang="hu-HU" sz="2400" dirty="0"/>
+            <a:endParaRPr lang="hu-HU" sz="2000" dirty="0"/>
           </a:p>
           <a:p>
             <a:pPr marL="342900" indent="-342900">
@@ -6467,8 +6472,8 @@
               <a:buChar char="-"/>
             </a:pPr>
             <a:r>
-              <a:rPr lang="hu-HU" sz="2400" dirty="0"/>
-              <a:t>A személy legyen kompetens (inkompetens személy csak a bajt hozza)</a:t>
+              <a:rPr lang="hu-HU" sz="2000" dirty="0"/>
+              <a:t>A személy legyen kompetens és talpra esett (inkompetens személy csak a bajt hozza)</a:t>
             </a:r>
           </a:p>
           <a:p>
@@ -6476,7 +6481,7 @@
               <a:buFontTx/>
               <a:buChar char="-"/>
             </a:pPr>
-            <a:endParaRPr lang="hu-HU" sz="2400" dirty="0"/>
+            <a:endParaRPr lang="hu-HU" sz="2000" dirty="0"/>
           </a:p>
           <a:p>
             <a:pPr marL="342900" indent="-342900">
@@ -6484,16 +6489,23 @@
               <a:buChar char="-"/>
             </a:pPr>
             <a:r>
-              <a:rPr lang="hu-HU" sz="2400" dirty="0"/>
-              <a:t>Legyen </a:t>
-            </a:r>
-            <a:r>
-              <a:rPr lang="hu-HU" sz="2400" dirty="0" err="1"/>
-              <a:t>barátságos,türelmes</a:t>
-            </a:r>
-            <a:r>
-              <a:rPr lang="hu-HU" sz="2400" dirty="0"/>
-              <a:t>, csapatmunkát toleráló egyén</a:t>
+              <a:rPr lang="hu-HU" sz="2000" dirty="0"/>
+              <a:t>Legyen barátságos, türelmes, csapatmunkát toleráló egyén</a:t>
+            </a:r>
+            <a:br>
+              <a:rPr lang="hu-HU" sz="2000" dirty="0"/>
+            </a:br>
+            <a:r>
+              <a:rPr lang="hu-HU" sz="2000" dirty="0"/>
+              <a:t> De ne legyen túlságosan </a:t>
+            </a:r>
+            <a:r>
+              <a:rPr lang="hu-HU" sz="2000" dirty="0" err="1"/>
+              <a:t>viccelős</a:t>
+            </a:r>
+            <a:r>
+              <a:rPr lang="hu-HU" sz="2000" dirty="0"/>
+              <a:t> személy (vegye komolyan a munkáját)</a:t>
             </a:r>
           </a:p>
           <a:p>
@@ -6502,7 +6514,7 @@
               <a:buChar char="-"/>
             </a:pPr>
             <a:r>
-              <a:rPr lang="hu-HU" sz="2400" dirty="0"/>
+              <a:rPr lang="hu-HU" sz="2000" dirty="0"/>
               <a:t>Legyen az illető legyen szorgalmas, ne csak lopja a napot miközben mindenki más dolgozik, és ne használja ki a többi személyt</a:t>
             </a:r>
           </a:p>
